--- a/classes/parte-1-redes-y-seguridad-de-redes/040-man-in-the-middle-tecnicas-y-defensa/clase-040-presentacion.pptx
+++ b/classes/parte-1-redes-y-seguridad-de-redes/040-man-in-the-middle-tecnicas-y-defensa/clase-040-presentacion.pptx
@@ -17,6 +17,9 @@
     <p:sldId id="265" r:id="rId16"/>
     <p:sldId id="266" r:id="rId17"/>
     <p:sldId id="267" r:id="rId18"/>
+    <p:sldId id="268" r:id="rId19"/>
+    <p:sldId id="269" r:id="rId20"/>
+    <p:sldId id="270" r:id="rId21"/>
   </p:sldIdLst>
   <p:sldSz cx="9144000" cy="6858000" type="screen4x3"/>
   <p:notesSz cx="6858000" cy="9144000"/>
@@ -3198,7 +3201,7 @@
                   <a:srgbClr val="0B3D2E"/>
                 </a:solidFill>
               </a:rPr>
-              <a:t>⚠️ Errores comunes</a:t>
+              <a:t>✍️ Ejercicios</a:t>
             </a:r>
           </a:p>
         </p:txBody>
@@ -3236,67 +3239,82 @@
                   <a:srgbClr val="22282E"/>
                 </a:solidFill>
               </a:rPr>
-              <a:t>•  mitmproxy no ve tráfico — Falta el REDIRECT de iptables o ipforward; revisa NAT y reenvío</a:t>
-            </a:r>
-          </a:p>
-          <a:p>
-            <a:pPr>
-              <a:spcAft>
-                <a:spcPts val="600"/>
-              </a:spcAft>
-            </a:pPr>
-            <a:r>
-              <a:rPr sz="1500">
-                <a:solidFill>
-                  <a:srgbClr val="22282E"/>
-                </a:solidFill>
-              </a:rPr>
-              <a:t>•  El navegador muestra advertencia de certificado — Es la defensa funcionando; sin la CA del atacante instalada, TLS rechaza el MitM</a:t>
-            </a:r>
-          </a:p>
-          <a:p>
-            <a:pPr>
-              <a:spcAft>
-                <a:spcPts val="600"/>
-              </a:spcAft>
-            </a:pPr>
-            <a:r>
-              <a:rPr sz="1500">
-                <a:solidFill>
-                  <a:srgbClr val="22282E"/>
-                </a:solidFill>
-              </a:rPr>
-              <a:t>•  SSL stripping no funciona — El sitio usa HSTS/preload; ese es precisamente el resultado esperado</a:t>
-            </a:r>
-          </a:p>
-          <a:p>
-            <a:pPr>
-              <a:spcAft>
-                <a:spcPts val="600"/>
-              </a:spcAft>
-            </a:pPr>
-            <a:r>
-              <a:rPr sz="1500">
-                <a:solidFill>
-                  <a:srgbClr val="22282E"/>
-                </a:solidFill>
-              </a:rPr>
-              <a:t>•  La víctima pierde conexión — Reenvío mal configurado; verifica que retransmites el tráfico interceptado</a:t>
-            </a:r>
-          </a:p>
-          <a:p>
-            <a:pPr>
-              <a:spcAft>
-                <a:spcPts val="600"/>
-              </a:spcAft>
-            </a:pPr>
-            <a:r>
-              <a:rPr sz="1500">
-                <a:solidFill>
-                  <a:srgbClr val="22282E"/>
-                </a:solidFill>
-              </a:rPr>
-              <a:t>•  No puedes modificar HTTPS — El cifrado lo impide sin un certificado de confianza; no es un fallo, es seguridad</a:t>
+              <a:t>•  Intercepta y modifica una respuesta HTTP (p. ej. cambia un texto de la página) con mitmproxy en laboratorio.</a:t>
+            </a:r>
+          </a:p>
+          <a:p>
+            <a:pPr>
+              <a:spcAft>
+                <a:spcPts val="600"/>
+              </a:spcAft>
+            </a:pPr>
+            <a:r>
+              <a:rPr sz="1500">
+                <a:solidFill>
+                  <a:srgbClr val="22282E"/>
+                </a:solidFill>
+              </a:rPr>
+              <a:t>•  Compara el resultado del stripping en un sitio con HSTS y otro sin él.</a:t>
+            </a:r>
+          </a:p>
+          <a:p>
+            <a:pPr>
+              <a:spcAft>
+                <a:spcPts val="600"/>
+              </a:spcAft>
+            </a:pPr>
+            <a:r>
+              <a:rPr sz="1500">
+                <a:solidFill>
+                  <a:srgbClr val="22282E"/>
+                </a:solidFill>
+              </a:rPr>
+              <a:t>•  Explica por qué el pinning protege a una app móvil aun con un certificado "válido" del atacante.</a:t>
+            </a:r>
+          </a:p>
+          <a:p>
+            <a:pPr>
+              <a:spcAft>
+                <a:spcPts val="600"/>
+              </a:spcAft>
+            </a:pPr>
+            <a:r>
+              <a:rPr sz="1500">
+                <a:solidFill>
+                  <a:srgbClr val="22282E"/>
+                </a:solidFill>
+              </a:rPr>
+              <a:t>•  Identifica en una captura los indicadores de un MitM (cambios de MAC del gateway, certificados anómalos).</a:t>
+            </a:r>
+          </a:p>
+          <a:p>
+            <a:pPr>
+              <a:spcAft>
+                <a:spcPts val="600"/>
+              </a:spcAft>
+            </a:pPr>
+            <a:r>
+              <a:rPr sz="1500">
+                <a:solidFill>
+                  <a:srgbClr val="22282E"/>
+                </a:solidFill>
+              </a:rPr>
+              <a:t>•  Configura HSTS con preload en tu servidor y verifica la cabecera con curl -I.</a:t>
+            </a:r>
+          </a:p>
+          <a:p>
+            <a:pPr>
+              <a:spcAft>
+                <a:spcPts val="600"/>
+              </a:spcAft>
+            </a:pPr>
+            <a:r>
+              <a:rPr sz="1500">
+                <a:solidFill>
+                  <a:srgbClr val="22282E"/>
+                </a:solidFill>
+              </a:rPr>
+              <a:t>•  Argumenta cómo una VPN (clase 036) reduce el riesgo de MitM en WiFi público.</a:t>
             </a:r>
           </a:p>
         </p:txBody>
@@ -3347,7 +3365,7 @@
                   <a:srgbClr val="0B3D2E"/>
                 </a:solidFill>
               </a:rPr>
-              <a:t>❓ Preguntas frecuentes</a:t>
+              <a:t>📝 Reto verificable</a:t>
             </a:r>
           </a:p>
         </p:txBody>
@@ -3385,97 +3403,22 @@
                   <a:srgbClr val="22282E"/>
                 </a:solidFill>
               </a:rPr>
-              <a:t>•  ❓ ¿HTTPS elimina el riesgo de MitM?</a:t>
-            </a:r>
-          </a:p>
-          <a:p>
-            <a:pPr>
-              <a:spcAft>
-                <a:spcPts val="600"/>
-              </a:spcAft>
-            </a:pPr>
-            <a:r>
-              <a:rPr sz="1500">
-                <a:solidFill>
-                  <a:srgbClr val="22282E"/>
-                </a:solidFill>
-              </a:rPr>
-              <a:t>•  Lo reduce enormemente si está bien implementado (certificados válidos, HSTS, TLS moderno). El riesgo residual viene de usuarios que ignoran advertencias o de CAs comprometidas; el pinning cubre esos casos.</a:t>
-            </a:r>
-          </a:p>
-          <a:p>
-            <a:pPr>
-              <a:spcAft>
-                <a:spcPts val="600"/>
-              </a:spcAft>
-            </a:pPr>
-            <a:r>
-              <a:rPr sz="1500">
-                <a:solidFill>
-                  <a:srgbClr val="22282E"/>
-                </a:solidFill>
-              </a:rPr>
-              <a:t>•  ❓ ¿Qué es exactamente SSL stripping?</a:t>
-            </a:r>
-          </a:p>
-          <a:p>
-            <a:pPr>
-              <a:spcAft>
-                <a:spcPts val="600"/>
-              </a:spcAft>
-            </a:pPr>
-            <a:r>
-              <a:rPr sz="1500">
-                <a:solidFill>
-                  <a:srgbClr val="22282E"/>
-                </a:solidFill>
-              </a:rPr>
-              <a:t>•  Un ataque que impide que la víctima llegue a establecer HTTPS, manteniéndola en HTTP con el atacante en medio. HSTS lo neutraliza porque el navegador exige HTTPS de antemano.</a:t>
-            </a:r>
-          </a:p>
-          <a:p>
-            <a:pPr>
-              <a:spcAft>
-                <a:spcPts val="600"/>
-              </a:spcAft>
-            </a:pPr>
-            <a:r>
-              <a:rPr sz="1500">
-                <a:solidFill>
-                  <a:srgbClr val="22282E"/>
-                </a:solidFill>
-              </a:rPr>
-              <a:t>•  ❓ ¿Cómo detecto que soy víctima de un MitM?</a:t>
-            </a:r>
-          </a:p>
-          <a:p>
-            <a:pPr>
-              <a:spcAft>
-                <a:spcPts val="600"/>
-              </a:spcAft>
-            </a:pPr>
-            <a:r>
-              <a:rPr sz="1500">
-                <a:solidFill>
-                  <a:srgbClr val="22282E"/>
-                </a:solidFill>
-              </a:rPr>
-              <a:t>•  Advertencias de certificado inesperadas, cambios en la MAC del gateway, degradación a HTTP en sitios que deberían ser HTTPS, o certificados emitidos por CAs raras.</a:t>
-            </a:r>
-          </a:p>
-          <a:p>
-            <a:pPr>
-              <a:spcAft>
-                <a:spcPts val="600"/>
-              </a:spcAft>
-            </a:pPr>
-            <a:r>
-              <a:rPr sz="1500">
-                <a:solidFill>
-                  <a:srgbClr val="22282E"/>
-                </a:solidFill>
-              </a:rPr>
-              <a:t>•  ❓ ¿La mejor defensa personal en WiFi público?</a:t>
+              <a:t>•  Monta en laboratorio un escenario MitM contra dos versiones de tu propio sitio: una vulnerable (HTTP/sin HSTS) y otra endurecida (HTTPS + HSTS). Demuestra que puedes interceptar/modificar la primera…</a:t>
+            </a:r>
+          </a:p>
+          <a:p>
+            <a:pPr>
+              <a:spcAft>
+                <a:spcPts val="600"/>
+              </a:spcAft>
+            </a:pPr>
+            <a:r>
+              <a:rPr sz="1500">
+                <a:solidFill>
+                  <a:srgbClr val="22282E"/>
+                </a:solidFill>
+              </a:rPr>
+              <a:t>•  Criterio de aceptación: evidencias claras de intercepción exitosa en la versión vulnerable y de fallo del ataque en la endurecida, con explicación correcta del mecanismo defensivo (HSTS impide el…</a:t>
             </a:r>
           </a:p>
         </p:txBody>
@@ -3526,7 +3469,7 @@
                   <a:srgbClr val="0B3D2E"/>
                 </a:solidFill>
               </a:rPr>
-              <a:t>🔗 Referencias</a:t>
+              <a:t>⚠️ Errores comunes</a:t>
             </a:r>
           </a:p>
         </p:txBody>
@@ -3564,6 +3507,334 @@
                   <a:srgbClr val="22282E"/>
                 </a:solidFill>
               </a:rPr>
+              <a:t>•  mitmproxy no ve tráfico — Falta el REDIRECT de iptables o ipforward; revisa NAT y reenvío</a:t>
+            </a:r>
+          </a:p>
+          <a:p>
+            <a:pPr>
+              <a:spcAft>
+                <a:spcPts val="600"/>
+              </a:spcAft>
+            </a:pPr>
+            <a:r>
+              <a:rPr sz="1500">
+                <a:solidFill>
+                  <a:srgbClr val="22282E"/>
+                </a:solidFill>
+              </a:rPr>
+              <a:t>•  El navegador muestra advertencia de certificado — Es la defensa funcionando; sin la CA del atacante instalada, TLS rechaza el MitM</a:t>
+            </a:r>
+          </a:p>
+          <a:p>
+            <a:pPr>
+              <a:spcAft>
+                <a:spcPts val="600"/>
+              </a:spcAft>
+            </a:pPr>
+            <a:r>
+              <a:rPr sz="1500">
+                <a:solidFill>
+                  <a:srgbClr val="22282E"/>
+                </a:solidFill>
+              </a:rPr>
+              <a:t>•  SSL stripping no funciona — El sitio usa HSTS/preload; ese es precisamente el resultado esperado</a:t>
+            </a:r>
+          </a:p>
+          <a:p>
+            <a:pPr>
+              <a:spcAft>
+                <a:spcPts val="600"/>
+              </a:spcAft>
+            </a:pPr>
+            <a:r>
+              <a:rPr sz="1500">
+                <a:solidFill>
+                  <a:srgbClr val="22282E"/>
+                </a:solidFill>
+              </a:rPr>
+              <a:t>•  La víctima pierde conexión — Reenvío mal configurado; verifica que retransmites el tráfico interceptado</a:t>
+            </a:r>
+          </a:p>
+          <a:p>
+            <a:pPr>
+              <a:spcAft>
+                <a:spcPts val="600"/>
+              </a:spcAft>
+            </a:pPr>
+            <a:r>
+              <a:rPr sz="1500">
+                <a:solidFill>
+                  <a:srgbClr val="22282E"/>
+                </a:solidFill>
+              </a:rPr>
+              <a:t>•  No puedes modificar HTTPS — El cifrado lo impide sin un certificado de confianza; no es un fallo, es seguridad</a:t>
+            </a:r>
+          </a:p>
+        </p:txBody>
+      </p:sp>
+    </p:spTree>
+  </p:cSld>
+  <p:clrMapOvr>
+    <a:masterClrMapping/>
+  </p:clrMapOvr>
+</p:sld>
+</file>
+
+<file path=ppt/slides/slide13.xml><?xml version="1.0" encoding="utf-8"?>
+<p:sld xmlns:a="http://schemas.openxmlformats.org/drawingml/2006/main" xmlns:p="http://schemas.openxmlformats.org/presentationml/2006/main" xmlns:r="http://schemas.openxmlformats.org/officeDocument/2006/relationships">
+  <p:cSld>
+    <p:spTree>
+      <p:nvGrpSpPr>
+        <p:cNvPr id="1" name=""/>
+        <p:cNvGrpSpPr/>
+        <p:nvPr/>
+      </p:nvGrpSpPr>
+      <p:grpSpPr/>
+      <p:sp>
+        <p:nvSpPr>
+          <p:cNvPr id="2" name="TextBox 1"/>
+          <p:cNvSpPr txBox="1"/>
+          <p:nvPr/>
+        </p:nvSpPr>
+        <p:spPr>
+          <a:xfrm>
+            <a:off x="457200" y="320040"/>
+            <a:ext cx="8229600" cy="822960"/>
+          </a:xfrm>
+          <a:prstGeom prst="rect">
+            <a:avLst/>
+          </a:prstGeom>
+          <a:noFill/>
+        </p:spPr>
+        <p:txBody>
+          <a:bodyPr wrap="square">
+            <a:spAutoFit/>
+          </a:bodyPr>
+          <a:lstStyle/>
+          <a:p>
+            <a:r>
+              <a:rPr sz="2600" b="1">
+                <a:solidFill>
+                  <a:srgbClr val="0B3D2E"/>
+                </a:solidFill>
+              </a:rPr>
+              <a:t>❓ Preguntas frecuentes</a:t>
+            </a:r>
+          </a:p>
+        </p:txBody>
+      </p:sp>
+      <p:sp>
+        <p:nvSpPr>
+          <p:cNvPr id="3" name="TextBox 2"/>
+          <p:cNvSpPr txBox="1"/>
+          <p:nvPr/>
+        </p:nvSpPr>
+        <p:spPr>
+          <a:xfrm>
+            <a:off x="457200" y="1280160"/>
+            <a:ext cx="8229600" cy="4937760"/>
+          </a:xfrm>
+          <a:prstGeom prst="rect">
+            <a:avLst/>
+          </a:prstGeom>
+          <a:noFill/>
+        </p:spPr>
+        <p:txBody>
+          <a:bodyPr wrap="square">
+            <a:spAutoFit/>
+          </a:bodyPr>
+          <a:lstStyle/>
+          <a:p>
+            <a:pPr>
+              <a:spcAft>
+                <a:spcPts val="600"/>
+              </a:spcAft>
+            </a:pPr>
+            <a:r>
+              <a:rPr sz="1500">
+                <a:solidFill>
+                  <a:srgbClr val="22282E"/>
+                </a:solidFill>
+              </a:rPr>
+              <a:t>•  ❓ ¿HTTPS elimina el riesgo de MitM?</a:t>
+            </a:r>
+          </a:p>
+          <a:p>
+            <a:pPr>
+              <a:spcAft>
+                <a:spcPts val="600"/>
+              </a:spcAft>
+            </a:pPr>
+            <a:r>
+              <a:rPr sz="1500">
+                <a:solidFill>
+                  <a:srgbClr val="22282E"/>
+                </a:solidFill>
+              </a:rPr>
+              <a:t>•  Lo reduce enormemente si está bien implementado (certificados válidos, HSTS, TLS moderno). El riesgo residual viene de usuarios que ignoran advertencias o de CAs comprometidas; el pinning cubre esos…</a:t>
+            </a:r>
+          </a:p>
+          <a:p>
+            <a:pPr>
+              <a:spcAft>
+                <a:spcPts val="600"/>
+              </a:spcAft>
+            </a:pPr>
+            <a:r>
+              <a:rPr sz="1500">
+                <a:solidFill>
+                  <a:srgbClr val="22282E"/>
+                </a:solidFill>
+              </a:rPr>
+              <a:t>•  ❓ ¿Qué es exactamente SSL stripping?</a:t>
+            </a:r>
+          </a:p>
+          <a:p>
+            <a:pPr>
+              <a:spcAft>
+                <a:spcPts val="600"/>
+              </a:spcAft>
+            </a:pPr>
+            <a:r>
+              <a:rPr sz="1500">
+                <a:solidFill>
+                  <a:srgbClr val="22282E"/>
+                </a:solidFill>
+              </a:rPr>
+              <a:t>•  Un ataque que impide que la víctima llegue a establecer HTTPS, manteniéndola en HTTP con el atacante en medio. HSTS lo neutraliza porque el navegador exige HTTPS de antemano.</a:t>
+            </a:r>
+          </a:p>
+          <a:p>
+            <a:pPr>
+              <a:spcAft>
+                <a:spcPts val="600"/>
+              </a:spcAft>
+            </a:pPr>
+            <a:r>
+              <a:rPr sz="1500">
+                <a:solidFill>
+                  <a:srgbClr val="22282E"/>
+                </a:solidFill>
+              </a:rPr>
+              <a:t>•  ❓ ¿Cómo detecto que soy víctima de un MitM?</a:t>
+            </a:r>
+          </a:p>
+          <a:p>
+            <a:pPr>
+              <a:spcAft>
+                <a:spcPts val="600"/>
+              </a:spcAft>
+            </a:pPr>
+            <a:r>
+              <a:rPr sz="1500">
+                <a:solidFill>
+                  <a:srgbClr val="22282E"/>
+                </a:solidFill>
+              </a:rPr>
+              <a:t>•  Advertencias de certificado inesperadas, cambios en la MAC del gateway, degradación a HTTP en sitios que deberían ser HTTPS, o certificados emitidos por CAs raras.</a:t>
+            </a:r>
+          </a:p>
+          <a:p>
+            <a:pPr>
+              <a:spcAft>
+                <a:spcPts val="600"/>
+              </a:spcAft>
+            </a:pPr>
+            <a:r>
+              <a:rPr sz="1500">
+                <a:solidFill>
+                  <a:srgbClr val="22282E"/>
+                </a:solidFill>
+              </a:rPr>
+              <a:t>•  ❓ ¿La mejor defensa personal en WiFi público?</a:t>
+            </a:r>
+          </a:p>
+        </p:txBody>
+      </p:sp>
+    </p:spTree>
+  </p:cSld>
+  <p:clrMapOvr>
+    <a:masterClrMapping/>
+  </p:clrMapOvr>
+</p:sld>
+</file>
+
+<file path=ppt/slides/slide14.xml><?xml version="1.0" encoding="utf-8"?>
+<p:sld xmlns:a="http://schemas.openxmlformats.org/drawingml/2006/main" xmlns:p="http://schemas.openxmlformats.org/presentationml/2006/main" xmlns:r="http://schemas.openxmlformats.org/officeDocument/2006/relationships">
+  <p:cSld>
+    <p:spTree>
+      <p:nvGrpSpPr>
+        <p:cNvPr id="1" name=""/>
+        <p:cNvGrpSpPr/>
+        <p:nvPr/>
+      </p:nvGrpSpPr>
+      <p:grpSpPr/>
+      <p:sp>
+        <p:nvSpPr>
+          <p:cNvPr id="2" name="TextBox 1"/>
+          <p:cNvSpPr txBox="1"/>
+          <p:nvPr/>
+        </p:nvSpPr>
+        <p:spPr>
+          <a:xfrm>
+            <a:off x="457200" y="320040"/>
+            <a:ext cx="8229600" cy="822960"/>
+          </a:xfrm>
+          <a:prstGeom prst="rect">
+            <a:avLst/>
+          </a:prstGeom>
+          <a:noFill/>
+        </p:spPr>
+        <p:txBody>
+          <a:bodyPr wrap="square">
+            <a:spAutoFit/>
+          </a:bodyPr>
+          <a:lstStyle/>
+          <a:p>
+            <a:r>
+              <a:rPr sz="2600" b="1">
+                <a:solidFill>
+                  <a:srgbClr val="0B3D2E"/>
+                </a:solidFill>
+              </a:rPr>
+              <a:t>🔗 Referencias</a:t>
+            </a:r>
+          </a:p>
+        </p:txBody>
+      </p:sp>
+      <p:sp>
+        <p:nvSpPr>
+          <p:cNvPr id="3" name="TextBox 2"/>
+          <p:cNvSpPr txBox="1"/>
+          <p:nvPr/>
+        </p:nvSpPr>
+        <p:spPr>
+          <a:xfrm>
+            <a:off x="457200" y="1280160"/>
+            <a:ext cx="8229600" cy="4937760"/>
+          </a:xfrm>
+          <a:prstGeom prst="rect">
+            <a:avLst/>
+          </a:prstGeom>
+          <a:noFill/>
+        </p:spPr>
+        <p:txBody>
+          <a:bodyPr wrap="square">
+            <a:spAutoFit/>
+          </a:bodyPr>
+          <a:lstStyle/>
+          <a:p>
+            <a:pPr>
+              <a:spcAft>
+                <a:spcPts val="600"/>
+              </a:spcAft>
+            </a:pPr>
+            <a:r>
+              <a:rPr sz="1500">
+                <a:solidFill>
+                  <a:srgbClr val="22282E"/>
+                </a:solidFill>
+              </a:rPr>
               <a:t>•  OWASP — Man-in-the-Middle Attack. &lt;https://owasp.org/www-community/attacks/Manipulator-in-the-middleattack&gt;</a:t>
             </a:r>
           </a:p>
@@ -3614,6 +3885,81 @@
           </a:p>
         </p:txBody>
       </p:sp>
+    </p:spTree>
+  </p:cSld>
+  <p:clrMapOvr>
+    <a:masterClrMapping/>
+  </p:clrMapOvr>
+</p:sld>
+</file>
+
+<file path=ppt/slides/slide15.xml><?xml version="1.0" encoding="utf-8"?>
+<p:sld xmlns:a="http://schemas.openxmlformats.org/drawingml/2006/main" xmlns:p="http://schemas.openxmlformats.org/presentationml/2006/main" xmlns:r="http://schemas.openxmlformats.org/officeDocument/2006/relationships">
+  <p:cSld>
+    <p:spTree>
+      <p:nvGrpSpPr>
+        <p:cNvPr id="1" name=""/>
+        <p:cNvGrpSpPr/>
+        <p:nvPr/>
+      </p:nvGrpSpPr>
+      <p:grpSpPr/>
+      <p:sp>
+        <p:nvSpPr>
+          <p:cNvPr id="2" name="TextBox 1"/>
+          <p:cNvSpPr txBox="1"/>
+          <p:nvPr/>
+        </p:nvSpPr>
+        <p:spPr>
+          <a:xfrm>
+            <a:off x="457200" y="274320"/>
+            <a:ext cx="8229600" cy="640080"/>
+          </a:xfrm>
+          <a:prstGeom prst="rect">
+            <a:avLst/>
+          </a:prstGeom>
+          <a:noFill/>
+        </p:spPr>
+        <p:txBody>
+          <a:bodyPr wrap="square">
+            <a:spAutoFit/>
+          </a:bodyPr>
+          <a:lstStyle/>
+          <a:p>
+            <a:r>
+              <a:rPr sz="2200" b="1">
+                <a:solidFill>
+                  <a:srgbClr val="0B3D2E"/>
+                </a:solidFill>
+              </a:rPr>
+              <a:t>Diagrama de la clase</a:t>
+            </a:r>
+          </a:p>
+        </p:txBody>
+      </p:sp>
+      <p:pic>
+        <p:nvPicPr>
+          <p:cNvPr id="3" name="Picture 2" descr="dc4a0d78ac1836ba.png"/>
+          <p:cNvPicPr>
+            <a:picLocks noChangeAspect="1"/>
+          </p:cNvPicPr>
+          <p:nvPr/>
+        </p:nvPicPr>
+        <p:blipFill>
+          <a:blip r:embed="rId2"/>
+          <a:stretch>
+            <a:fillRect/>
+          </a:stretch>
+        </p:blipFill>
+        <p:spPr>
+          <a:xfrm>
+            <a:off x="801725" y="1097280"/>
+            <a:ext cx="7540549" cy="5303520"/>
+          </a:xfrm>
+          <a:prstGeom prst="rect">
+            <a:avLst/>
+          </a:prstGeom>
+        </p:spPr>
+      </p:pic>
     </p:spTree>
   </p:cSld>
   <p:clrMapOvr>
@@ -3698,7 +4044,7 @@
                   <a:srgbClr val="22282E"/>
                 </a:solidFill>
               </a:rPr>
-              <a:t>•  Integrar lo aprendido en un ataque Man-in-the-Middle completo: posicionamiento (ARP/DNS spoofing, rogue gateway), interceptación de tráfico, intentos de degradación de TLS y, sobre todo, las defensas que lo derrotan (HSTS, certificate pinning, cifrado extremo a extremo, DAI). El énfasis es entender el ataque para saber defender.</a:t>
+              <a:t>•  Integrar lo aprendido en un ataque Man-in-the-Middle completo: posicionamiento (ARP/DNS spoofing, rogue gateway), interceptación de tráfico, intentos de degradación de TLS y, sobre todo, las defensas…</a:t>
             </a:r>
           </a:p>
         </p:txBody>
@@ -4107,7 +4453,7 @@
                   <a:srgbClr val="0B3D2E"/>
                 </a:solidFill>
               </a:rPr>
-              <a:t>📖 Definiciones y características</a:t>
+              <a:t>🧠 Explicación en profundidad</a:t>
             </a:r>
           </a:p>
         </p:txBody>
@@ -4145,82 +4491,97 @@
                   <a:srgbClr val="22282E"/>
                 </a:solidFill>
               </a:rPr>
-              <a:t>•  MitM: el atacante se sitúa entre dos partes, retransmitiendo (y opcionalmente alterando) su comunicación sin que lo noten.</a:t>
-            </a:r>
-          </a:p>
-          <a:p>
-            <a:pPr>
-              <a:spcAft>
-                <a:spcPts val="600"/>
-              </a:spcAft>
-            </a:pPr>
-            <a:r>
-              <a:rPr sz="1500">
-                <a:solidFill>
-                  <a:srgbClr val="22282E"/>
-                </a:solidFill>
-              </a:rPr>
-              <a:t>•  SSL stripping: degradación de HTTPS a HTTP interceptando la conexión inicial; se mitiga con HSTS.</a:t>
-            </a:r>
-          </a:p>
-          <a:p>
-            <a:pPr>
-              <a:spcAft>
-                <a:spcPts val="600"/>
-              </a:spcAft>
-            </a:pPr>
-            <a:r>
-              <a:rPr sz="1500">
-                <a:solidFill>
-                  <a:srgbClr val="22282E"/>
-                </a:solidFill>
-              </a:rPr>
-              <a:t>•  HSTS (HTTP Strict Transport Security): cabecera que obliga al navegador a usar solo HTTPS para un dominio, evitando el stripping.</a:t>
-            </a:r>
-          </a:p>
-          <a:p>
-            <a:pPr>
-              <a:spcAft>
-                <a:spcPts val="600"/>
-              </a:spcAft>
-            </a:pPr>
-            <a:r>
-              <a:rPr sz="1500">
-                <a:solidFill>
-                  <a:srgbClr val="22282E"/>
-                </a:solidFill>
-              </a:rPr>
-              <a:t>•  Certificate pinning: la aplicación acepta solo un certificado/clave concretos, de modo que un certificado falso del atacante es rechazado.</a:t>
-            </a:r>
-          </a:p>
-          <a:p>
-            <a:pPr>
-              <a:spcAft>
-                <a:spcPts val="600"/>
-              </a:spcAft>
-            </a:pPr>
-            <a:r>
-              <a:rPr sz="1500">
-                <a:solidFill>
-                  <a:srgbClr val="22282E"/>
-                </a:solidFill>
-              </a:rPr>
-              <a:t>•  Rogue gateway / evil twin: puerta de enlace o AP falso que canaliza el tráfico de la víctima por el atacante.</a:t>
-            </a:r>
-          </a:p>
-          <a:p>
-            <a:pPr>
-              <a:spcAft>
-                <a:spcPts val="600"/>
-              </a:spcAft>
-            </a:pPr>
-            <a:r>
-              <a:rPr sz="1500">
-                <a:solidFill>
-                  <a:srgbClr val="22282E"/>
-                </a:solidFill>
-              </a:rPr>
-              <a:t>•  DNSSEC: firma las respuestas DNS para evitar su falsificación (se amplía en la clase 041).</a:t>
+              <a:t>•  Man-in-the-middle nombra una posición: estar en medio de dos partes que creen</a:t>
+            </a:r>
+          </a:p>
+          <a:p>
+            <a:pPr>
+              <a:spcAft>
+                <a:spcPts val="600"/>
+              </a:spcAft>
+            </a:pPr>
+            <a:r>
+              <a:rPr sz="1500">
+                <a:solidFill>
+                  <a:srgbClr val="22282E"/>
+                </a:solidFill>
+              </a:rPr>
+              <a:t>•  hablar directamente entre sí, pudiendo leer y modificar lo que se dicen. Cómo se llega a</a:t>
+            </a:r>
+          </a:p>
+          <a:p>
+            <a:pPr>
+              <a:spcAft>
+                <a:spcPts val="600"/>
+              </a:spcAft>
+            </a:pPr>
+            <a:r>
+              <a:rPr sz="1500">
+                <a:solidFill>
+                  <a:srgbClr val="22282E"/>
+                </a:solidFill>
+              </a:rPr>
+              <a:t>•  esa posición varía —ARP spoofing en la LAN (clase 039), un servidor DNS que responde</a:t>
+            </a:r>
+          </a:p>
+          <a:p>
+            <a:pPr>
+              <a:spcAft>
+                <a:spcPts val="600"/>
+              </a:spcAft>
+            </a:pPr>
+            <a:r>
+              <a:rPr sz="1500">
+                <a:solidFill>
+                  <a:srgbClr val="22282E"/>
+                </a:solidFill>
+              </a:rPr>
+              <a:t>•  mentiras (clase 041), un punto de acceso falso (clase 038), un router comprometido— pero</a:t>
+            </a:r>
+          </a:p>
+          <a:p>
+            <a:pPr>
+              <a:spcAft>
+                <a:spcPts val="600"/>
+              </a:spcAft>
+            </a:pPr>
+            <a:r>
+              <a:rPr sz="1500">
+                <a:solidFill>
+                  <a:srgbClr val="22282E"/>
+                </a:solidFill>
+              </a:rPr>
+              <a:t>•  una vez en medio, las capacidades son las mismas: interceptar, alterar e inyectar. Separar</a:t>
+            </a:r>
+          </a:p>
+          <a:p>
+            <a:pPr>
+              <a:spcAft>
+                <a:spcPts val="600"/>
+              </a:spcAft>
+            </a:pPr>
+            <a:r>
+              <a:rPr sz="1500">
+                <a:solidFill>
+                  <a:srgbClr val="22282E"/>
+                </a:solidFill>
+              </a:rPr>
+              <a:t>•  la posición de la técnica de posicionamiento es lo que permite razonar sobre defensas,</a:t>
+            </a:r>
+          </a:p>
+          <a:p>
+            <a:pPr>
+              <a:spcAft>
+                <a:spcPts val="600"/>
+              </a:spcAft>
+            </a:pPr>
+            <a:r>
+              <a:rPr sz="1500">
+                <a:solidFill>
+                  <a:srgbClr val="22282E"/>
+                </a:solidFill>
+              </a:rPr>
+              <a:t>•  porque cada vía de acceso se cierra distinto pero todas desembocan en el mismo riesgo.</a:t>
             </a:r>
           </a:p>
         </p:txBody>
@@ -4271,7 +4632,7 @@
                   <a:srgbClr val="0B3D2E"/>
                 </a:solidFill>
               </a:rPr>
-              <a:t>🧰 Herramientas y preparación</a:t>
+              <a:t>📖 Definiciones y características</a:t>
             </a:r>
           </a:p>
         </p:txBody>
@@ -4309,37 +4670,82 @@
                   <a:srgbClr val="22282E"/>
                 </a:solidFill>
               </a:rPr>
-              <a:t>•  bettercap (framework MitM), mitmproxy (proxy HTTP/HTTPS interactivo), sslstrip (histórico).</a:t>
-            </a:r>
-          </a:p>
-          <a:p>
-            <a:pPr>
-              <a:spcAft>
-                <a:spcPts val="600"/>
-              </a:spcAft>
-            </a:pPr>
-            <a:r>
-              <a:rPr sz="1500">
-                <a:solidFill>
-                  <a:srgbClr val="22282E"/>
-                </a:solidFill>
-              </a:rPr>
-              <a:t>•  Wireshark para verificar el cifrado.</a:t>
-            </a:r>
-          </a:p>
-          <a:p>
-            <a:pPr>
-              <a:spcAft>
-                <a:spcPts val="600"/>
-              </a:spcAft>
-            </a:pPr>
-            <a:r>
-              <a:rPr sz="1500">
-                <a:solidFill>
-                  <a:srgbClr val="22282E"/>
-                </a:solidFill>
-              </a:rPr>
-              <a:t>•  Laboratorio con víctima, atacante y un servidor web propio (uno con HSTS, otro sin) para comparar.</a:t>
+              <a:t>•  MitM: el atacante se sitúa entre dos partes, retransmitiendo (y opcionalmente alterando) su comunicación sin que lo noten.</a:t>
+            </a:r>
+          </a:p>
+          <a:p>
+            <a:pPr>
+              <a:spcAft>
+                <a:spcPts val="600"/>
+              </a:spcAft>
+            </a:pPr>
+            <a:r>
+              <a:rPr sz="1500">
+                <a:solidFill>
+                  <a:srgbClr val="22282E"/>
+                </a:solidFill>
+              </a:rPr>
+              <a:t>•  SSL stripping: degradación de HTTPS a HTTP interceptando la conexión inicial; se mitiga con HSTS.</a:t>
+            </a:r>
+          </a:p>
+          <a:p>
+            <a:pPr>
+              <a:spcAft>
+                <a:spcPts val="600"/>
+              </a:spcAft>
+            </a:pPr>
+            <a:r>
+              <a:rPr sz="1500">
+                <a:solidFill>
+                  <a:srgbClr val="22282E"/>
+                </a:solidFill>
+              </a:rPr>
+              <a:t>•  HSTS (HTTP Strict Transport Security): cabecera que obliga al navegador a usar solo HTTPS para un dominio, evitando el stripping.</a:t>
+            </a:r>
+          </a:p>
+          <a:p>
+            <a:pPr>
+              <a:spcAft>
+                <a:spcPts val="600"/>
+              </a:spcAft>
+            </a:pPr>
+            <a:r>
+              <a:rPr sz="1500">
+                <a:solidFill>
+                  <a:srgbClr val="22282E"/>
+                </a:solidFill>
+              </a:rPr>
+              <a:t>•  Certificate pinning: la aplicación acepta solo un certificado/clave concretos, de modo que un certificado falso del atacante es rechazado.</a:t>
+            </a:r>
+          </a:p>
+          <a:p>
+            <a:pPr>
+              <a:spcAft>
+                <a:spcPts val="600"/>
+              </a:spcAft>
+            </a:pPr>
+            <a:r>
+              <a:rPr sz="1500">
+                <a:solidFill>
+                  <a:srgbClr val="22282E"/>
+                </a:solidFill>
+              </a:rPr>
+              <a:t>•  Rogue gateway / evil twin: puerta de enlace o AP falso que canaliza el tráfico de la víctima por el atacante.</a:t>
+            </a:r>
+          </a:p>
+          <a:p>
+            <a:pPr>
+              <a:spcAft>
+                <a:spcPts val="600"/>
+              </a:spcAft>
+            </a:pPr>
+            <a:r>
+              <a:rPr sz="1500">
+                <a:solidFill>
+                  <a:srgbClr val="22282E"/>
+                </a:solidFill>
+              </a:rPr>
+              <a:t>•  DNSSEC: firma las respuestas DNS para evitar su falsificación (se amplía en la clase 041).</a:t>
             </a:r>
           </a:p>
         </p:txBody>
@@ -4390,7 +4796,7 @@
                   <a:srgbClr val="0B3D2E"/>
                 </a:solidFill>
               </a:rPr>
-              <a:t>🧪 Laboratorio guiado</a:t>
+              <a:t>📔 Glosario</a:t>
             </a:r>
           </a:p>
         </p:txBody>
@@ -4428,97 +4834,97 @@
                   <a:srgbClr val="22282E"/>
                 </a:solidFill>
               </a:rPr>
-              <a:t>•  Posiciónate como MitM por ARP spoofing (repaso de la clase 039) con bettercap y activa el sniffing.</a:t>
-            </a:r>
-          </a:p>
-          <a:p>
-            <a:pPr>
-              <a:spcAft>
-                <a:spcPts val="600"/>
-              </a:spcAft>
-            </a:pPr>
-            <a:r>
-              <a:rPr sz="1500">
-                <a:solidFill>
-                  <a:srgbClr val="22282E"/>
-                </a:solidFill>
-              </a:rPr>
-              <a:t>•  Intercepta HTTP con mitmproxy en modo transparente:</a:t>
-            </a:r>
-          </a:p>
-          <a:p>
-            <a:pPr>
-              <a:spcAft>
-                <a:spcPts val="600"/>
-              </a:spcAft>
-            </a:pPr>
-            <a:r>
-              <a:rPr sz="1500">
-                <a:solidFill>
-                  <a:srgbClr val="22282E"/>
-                </a:solidFill>
-              </a:rPr>
-              <a:t>•  sudo sysctl -w net.ipv4.ipforward=1</a:t>
-            </a:r>
-          </a:p>
-          <a:p>
-            <a:pPr>
-              <a:spcAft>
-                <a:spcPts val="600"/>
-              </a:spcAft>
-            </a:pPr>
-            <a:r>
-              <a:rPr sz="1500">
-                <a:solidFill>
-                  <a:srgbClr val="22282E"/>
-                </a:solidFill>
-              </a:rPr>
-              <a:t>•  sudo iptables -t nat -A PREROUTING -i eth0 -p tcp --dport 80 -j REDIRECT --to-port 8080</a:t>
-            </a:r>
-          </a:p>
-          <a:p>
-            <a:pPr>
-              <a:spcAft>
-                <a:spcPts val="600"/>
-              </a:spcAft>
-            </a:pPr>
-            <a:r>
-              <a:rPr sz="1500">
-                <a:solidFill>
-                  <a:srgbClr val="22282E"/>
-                </a:solidFill>
-              </a:rPr>
-              <a:t>•  mitmproxy --mode transparent --listen-port 8080</a:t>
-            </a:r>
-          </a:p>
-          <a:p>
-            <a:pPr>
-              <a:spcAft>
-                <a:spcPts val="600"/>
-              </a:spcAft>
-            </a:pPr>
-            <a:r>
-              <a:rPr sz="1500">
-                <a:solidFill>
-                  <a:srgbClr val="22282E"/>
-                </a:solidFill>
-              </a:rPr>
-              <a:t>•  Navega desde la víctima a tu servidor HTTP de laboratorio y observa/modifica las peticiones.</a:t>
-            </a:r>
-          </a:p>
-          <a:p>
-            <a:pPr>
-              <a:spcAft>
-                <a:spcPts val="600"/>
-              </a:spcAft>
-            </a:pPr>
-            <a:r>
-              <a:rPr sz="1500">
-                <a:solidFill>
-                  <a:srgbClr val="22282E"/>
-                </a:solidFill>
-              </a:rPr>
-              <a:t>•  Prueba SSL stripping contra el servidor sin HSTS y observa que la conexión cae a HTTP.</a:t>
+              <a:t>•  Término — Definición concisa</a:t>
+            </a:r>
+          </a:p>
+          <a:p>
+            <a:pPr>
+              <a:spcAft>
+                <a:spcPts val="600"/>
+              </a:spcAft>
+            </a:pPr>
+            <a:r>
+              <a:rPr sz="1500">
+                <a:solidFill>
+                  <a:srgbClr val="22282E"/>
+                </a:solidFill>
+              </a:rPr>
+              <a:t>•  Man-in-the-middle — Posición entre dos partes que permite leer, alterar e inyectar</a:t>
+            </a:r>
+          </a:p>
+          <a:p>
+            <a:pPr>
+              <a:spcAft>
+                <a:spcPts val="600"/>
+              </a:spcAft>
+            </a:pPr>
+            <a:r>
+              <a:rPr sz="1500">
+                <a:solidFill>
+                  <a:srgbClr val="22282E"/>
+                </a:solidFill>
+              </a:rPr>
+              <a:t>•  Posicionamiento — Técnica para llegar a estar en medio (ARP, DNS, rogue AP…)</a:t>
+            </a:r>
+          </a:p>
+          <a:p>
+            <a:pPr>
+              <a:spcAft>
+                <a:spcPts val="600"/>
+              </a:spcAft>
+            </a:pPr>
+            <a:r>
+              <a:rPr sz="1500">
+                <a:solidFill>
+                  <a:srgbClr val="22282E"/>
+                </a:solidFill>
+              </a:rPr>
+              <a:t>•  Proxy transparente — Intermediario que intercepta sin que el cliente lo configure</a:t>
+            </a:r>
+          </a:p>
+          <a:p>
+            <a:pPr>
+              <a:spcAft>
+                <a:spcPts val="600"/>
+              </a:spcAft>
+            </a:pPr>
+            <a:r>
+              <a:rPr sz="1500">
+                <a:solidFill>
+                  <a:srgbClr val="22282E"/>
+                </a:solidFill>
+              </a:rPr>
+              <a:t>•  SSL stripping — Degradar HTTPS a HTTP aprovechando la primera petición en claro</a:t>
+            </a:r>
+          </a:p>
+          <a:p>
+            <a:pPr>
+              <a:spcAft>
+                <a:spcPts val="600"/>
+              </a:spcAft>
+            </a:pPr>
+            <a:r>
+              <a:rPr sz="1500">
+                <a:solidFill>
+                  <a:srgbClr val="22282E"/>
+                </a:solidFill>
+              </a:rPr>
+              <a:t>•  HSTS — Cabecera que fuerza al navegador a usar solo HTTPS con ese sitio</a:t>
+            </a:r>
+          </a:p>
+          <a:p>
+            <a:pPr>
+              <a:spcAft>
+                <a:spcPts val="600"/>
+              </a:spcAft>
+            </a:pPr>
+            <a:r>
+              <a:rPr sz="1500">
+                <a:solidFill>
+                  <a:srgbClr val="22282E"/>
+                </a:solidFill>
+              </a:rPr>
+              <a:t>•  HSTS preload — Lista integrada en el navegador; protege incluso la primera visita</a:t>
             </a:r>
           </a:p>
         </p:txBody>
@@ -4569,7 +4975,7 @@
                   <a:srgbClr val="0B3D2E"/>
                 </a:solidFill>
               </a:rPr>
-              <a:t>✍️ Ejercicios</a:t>
+              <a:t>🧰 Herramientas y preparación</a:t>
             </a:r>
           </a:p>
         </p:txBody>
@@ -4607,82 +5013,37 @@
                   <a:srgbClr val="22282E"/>
                 </a:solidFill>
               </a:rPr>
-              <a:t>•  Intercepta y modifica una respuesta HTTP (p. ej. cambia un texto de la página) con mitmproxy en laboratorio.</a:t>
-            </a:r>
-          </a:p>
-          <a:p>
-            <a:pPr>
-              <a:spcAft>
-                <a:spcPts val="600"/>
-              </a:spcAft>
-            </a:pPr>
-            <a:r>
-              <a:rPr sz="1500">
-                <a:solidFill>
-                  <a:srgbClr val="22282E"/>
-                </a:solidFill>
-              </a:rPr>
-              <a:t>•  Compara el resultado del stripping en un sitio con HSTS y otro sin él.</a:t>
-            </a:r>
-          </a:p>
-          <a:p>
-            <a:pPr>
-              <a:spcAft>
-                <a:spcPts val="600"/>
-              </a:spcAft>
-            </a:pPr>
-            <a:r>
-              <a:rPr sz="1500">
-                <a:solidFill>
-                  <a:srgbClr val="22282E"/>
-                </a:solidFill>
-              </a:rPr>
-              <a:t>•  Explica por qué el pinning protege a una app móvil aun con un certificado "válido" del atacante.</a:t>
-            </a:r>
-          </a:p>
-          <a:p>
-            <a:pPr>
-              <a:spcAft>
-                <a:spcPts val="600"/>
-              </a:spcAft>
-            </a:pPr>
-            <a:r>
-              <a:rPr sz="1500">
-                <a:solidFill>
-                  <a:srgbClr val="22282E"/>
-                </a:solidFill>
-              </a:rPr>
-              <a:t>•  Identifica en una captura los indicadores de un MitM (cambios de MAC del gateway, certificados anómalos).</a:t>
-            </a:r>
-          </a:p>
-          <a:p>
-            <a:pPr>
-              <a:spcAft>
-                <a:spcPts val="600"/>
-              </a:spcAft>
-            </a:pPr>
-            <a:r>
-              <a:rPr sz="1500">
-                <a:solidFill>
-                  <a:srgbClr val="22282E"/>
-                </a:solidFill>
-              </a:rPr>
-              <a:t>•  Configura HSTS con preload en tu servidor y verifica la cabecera con curl -I.</a:t>
-            </a:r>
-          </a:p>
-          <a:p>
-            <a:pPr>
-              <a:spcAft>
-                <a:spcPts val="600"/>
-              </a:spcAft>
-            </a:pPr>
-            <a:r>
-              <a:rPr sz="1500">
-                <a:solidFill>
-                  <a:srgbClr val="22282E"/>
-                </a:solidFill>
-              </a:rPr>
-              <a:t>•  Argumenta cómo una VPN (clase 036) reduce el riesgo de MitM en WiFi público.</a:t>
+              <a:t>•  bettercap (framework MitM), mitmproxy (proxy HTTP/HTTPS interactivo), sslstrip (histórico).</a:t>
+            </a:r>
+          </a:p>
+          <a:p>
+            <a:pPr>
+              <a:spcAft>
+                <a:spcPts val="600"/>
+              </a:spcAft>
+            </a:pPr>
+            <a:r>
+              <a:rPr sz="1500">
+                <a:solidFill>
+                  <a:srgbClr val="22282E"/>
+                </a:solidFill>
+              </a:rPr>
+              <a:t>•  Wireshark para verificar el cifrado.</a:t>
+            </a:r>
+          </a:p>
+          <a:p>
+            <a:pPr>
+              <a:spcAft>
+                <a:spcPts val="600"/>
+              </a:spcAft>
+            </a:pPr>
+            <a:r>
+              <a:rPr sz="1500">
+                <a:solidFill>
+                  <a:srgbClr val="22282E"/>
+                </a:solidFill>
+              </a:rPr>
+              <a:t>•  Laboratorio con víctima, atacante y un servidor web propio (uno con HSTS, otro sin) para comparar.</a:t>
             </a:r>
           </a:p>
         </p:txBody>
@@ -4733,7 +5094,7 @@
                   <a:srgbClr val="0B3D2E"/>
                 </a:solidFill>
               </a:rPr>
-              <a:t>📝 Reto verificable</a:t>
+              <a:t>🧪 Laboratorio guiado</a:t>
             </a:r>
           </a:p>
         </p:txBody>
@@ -4771,22 +5132,97 @@
                   <a:srgbClr val="22282E"/>
                 </a:solidFill>
               </a:rPr>
-              <a:t>•  Monta en laboratorio un escenario MitM contra dos versiones de tu propio sitio: una vulnerable (HTTP/sin HSTS) y otra endurecida (HTTPS + HSTS). Demuestra que puedes interceptar/modificar la primera y que la segunda resiste el ataque. Entrega capturas, la configuración de HSTS y una conclusión sobre qué defensa fue decisiva.</a:t>
-            </a:r>
-          </a:p>
-          <a:p>
-            <a:pPr>
-              <a:spcAft>
-                <a:spcPts val="600"/>
-              </a:spcAft>
-            </a:pPr>
-            <a:r>
-              <a:rPr sz="1500">
-                <a:solidFill>
-                  <a:srgbClr val="22282E"/>
-                </a:solidFill>
-              </a:rPr>
-              <a:t>•  Criterio de aceptación: evidencias claras de intercepción exitosa en la versión vulnerable y de fallo del ataque en la endurecida, con explicación correcta del mecanismo defensivo (HSTS impide el downgrade; TLS válido impide leer el contenido).</a:t>
+              <a:t>•  Posiciónate como MitM por ARP spoofing (repaso de la clase 039) con bettercap y activa el sniffing.</a:t>
+            </a:r>
+          </a:p>
+          <a:p>
+            <a:pPr>
+              <a:spcAft>
+                <a:spcPts val="600"/>
+              </a:spcAft>
+            </a:pPr>
+            <a:r>
+              <a:rPr sz="1500">
+                <a:solidFill>
+                  <a:srgbClr val="22282E"/>
+                </a:solidFill>
+              </a:rPr>
+              <a:t>•  Intercepta HTTP con mitmproxy en modo transparente:</a:t>
+            </a:r>
+          </a:p>
+          <a:p>
+            <a:pPr>
+              <a:spcAft>
+                <a:spcPts val="600"/>
+              </a:spcAft>
+            </a:pPr>
+            <a:r>
+              <a:rPr sz="1500">
+                <a:solidFill>
+                  <a:srgbClr val="22282E"/>
+                </a:solidFill>
+              </a:rPr>
+              <a:t>•  Navega desde la víctima a tu servidor HTTP de laboratorio y observa/modifica las peticiones.</a:t>
+            </a:r>
+          </a:p>
+          <a:p>
+            <a:pPr>
+              <a:spcAft>
+                <a:spcPts val="600"/>
+              </a:spcAft>
+            </a:pPr>
+            <a:r>
+              <a:rPr sz="1500">
+                <a:solidFill>
+                  <a:srgbClr val="22282E"/>
+                </a:solidFill>
+              </a:rPr>
+              <a:t>•  Prueba SSL stripping contra el servidor sin HSTS y observa que la conexión cae a HTTP.</a:t>
+            </a:r>
+          </a:p>
+          <a:p>
+            <a:pPr>
+              <a:spcAft>
+                <a:spcPts val="600"/>
+              </a:spcAft>
+            </a:pPr>
+            <a:r>
+              <a:rPr sz="1500">
+                <a:solidFill>
+                  <a:srgbClr val="22282E"/>
+                </a:solidFill>
+              </a:rPr>
+              <a:t>•  Repite contra el servidor con HSTS y comprueba que el navegador rechaza el downgrade: el ataque falla.</a:t>
+            </a:r>
+          </a:p>
+          <a:p>
+            <a:pPr>
+              <a:spcAft>
+                <a:spcPts val="600"/>
+              </a:spcAft>
+            </a:pPr>
+            <a:r>
+              <a:rPr sz="1500">
+                <a:solidFill>
+                  <a:srgbClr val="22282E"/>
+                </a:solidFill>
+              </a:rPr>
+              <a:t>•  Verifica el cifrado: en Wireshark, confirma que el tráfico HTTPS con TLS bien configurado es opaco para el atacante.</a:t>
+            </a:r>
+          </a:p>
+          <a:p>
+            <a:pPr>
+              <a:spcAft>
+                <a:spcPts val="600"/>
+              </a:spcAft>
+            </a:pPr>
+            <a:r>
+              <a:rPr sz="1500">
+                <a:solidFill>
+                  <a:srgbClr val="22282E"/>
+                </a:solidFill>
+              </a:rPr>
+              <a:t>•  Certificado falso: intenta un MitM sobre HTTPS presentando un certificado no confiable y observa la advertencia del navegador (defensa por la cadena de confianza).</a:t>
             </a:r>
           </a:p>
         </p:txBody>
